--- a/classes/parte-5-explotacion-de-sistemas-y-binarios/122-protecciones-modernas-aslr-dep-nx-stack-canaries-y-pie/clase-122-presentacion.pptx
+++ b/classes/parte-5-explotacion-de-sistemas-y-binarios/122-protecciones-modernas-aslr-dep-nx-stack-canaries-y-pie/clase-122-presentacion.pptx
@@ -17,6 +17,8 @@
     <p:sldId id="265" r:id="rId16"/>
     <p:sldId id="266" r:id="rId17"/>
     <p:sldId id="267" r:id="rId18"/>
+    <p:sldId id="268" r:id="rId19"/>
+    <p:sldId id="269" r:id="rId20"/>
   </p:sldIdLst>
   <p:sldSz cx="9144000" cy="6858000" type="screen4x3"/>
   <p:notesSz cx="6858000" cy="9144000"/>
@@ -3198,7 +3200,7 @@
                   <a:srgbClr val="0B3D2E"/>
                 </a:solidFill>
               </a:rPr>
-              <a:t>⚠️ Errores comunes</a:t>
+              <a:t>📝 Reto verificable</a:t>
             </a:r>
           </a:p>
         </p:txBody>
@@ -3236,67 +3238,52 @@
                   <a:srgbClr val="22282E"/>
                 </a:solidFill>
               </a:rPr>
-              <a:t>•  stack smashing detected — El canary detectó tu overflow; necesitas filtrarlo primero</a:t>
-            </a:r>
-          </a:p>
-          <a:p>
-            <a:pPr>
-              <a:spcAft>
-                <a:spcPts val="600"/>
-              </a:spcAft>
-            </a:pPr>
-            <a:r>
-              <a:rPr sz="1500">
-                <a:solidFill>
-                  <a:srgbClr val="22282E"/>
-                </a:solidFill>
-              </a:rPr>
-              <a:t>•  Direcciones cambian cada corrida — ASLR/PIE activos; hace falta un info leak</a:t>
-            </a:r>
-          </a:p>
-          <a:p>
-            <a:pPr>
-              <a:spcAft>
-                <a:spcPts val="600"/>
-              </a:spcAft>
-            </a:pPr>
-            <a:r>
-              <a:rPr sz="1500">
-                <a:solidFill>
-                  <a:srgbClr val="22282E"/>
-                </a:solidFill>
-              </a:rPr>
-              <a:t>•  Shellcode en stack no ejecuta — NX activo; usa ret2libc o ROP</a:t>
-            </a:r>
-          </a:p>
-          <a:p>
-            <a:pPr>
-              <a:spcAft>
-                <a:spcPts val="600"/>
-              </a:spcAft>
-            </a:pPr>
-            <a:r>
-              <a:rPr sz="1500">
-                <a:solidFill>
-                  <a:srgbClr val="22282E"/>
-                </a:solidFill>
-              </a:rPr>
-              <a:t>•  checksec dice "No canary" pero crashea igual — Otra mitigación (NX/PIE) está frenando el exploit</a:t>
-            </a:r>
-          </a:p>
-          <a:p>
-            <a:pPr>
-              <a:spcAft>
-                <a:spcPts val="600"/>
-              </a:spcAft>
-            </a:pPr>
-            <a:r>
-              <a:rPr sz="1500">
-                <a:solidFill>
-                  <a:srgbClr val="22282E"/>
-                </a:solidFill>
-              </a:rPr>
-              <a:t>•  Olvidas revertir ASLR a 2 — Deja la VM menos segura; restaura tras el laboratorio</a:t>
+              <a:t>•  Genera cuatro binarios del mismo fuente con combinaciones distintas de protecciones y entrega la</a:t>
+            </a:r>
+          </a:p>
+          <a:p>
+            <a:pPr>
+              <a:spcAft>
+                <a:spcPts val="600"/>
+              </a:spcAft>
+            </a:pPr>
+            <a:r>
+              <a:rPr sz="1500">
+                <a:solidFill>
+                  <a:srgbClr val="22282E"/>
+                </a:solidFill>
+              </a:rPr>
+              <a:t>•  salida de checksec de cada uno, clasificando cuál es más difícil de explotar y por qué.</a:t>
+            </a:r>
+          </a:p>
+          <a:p>
+            <a:pPr>
+              <a:spcAft>
+                <a:spcPts val="600"/>
+              </a:spcAft>
+            </a:pPr>
+            <a:r>
+              <a:rPr sz="1500">
+                <a:solidFill>
+                  <a:srgbClr val="22282E"/>
+                </a:solidFill>
+              </a:rPr>
+              <a:t>•  Criterio de aceptación: identificas correctamente qué binario tiene NX+Canary+PIE+Full RELRO y</a:t>
+            </a:r>
+          </a:p>
+          <a:p>
+            <a:pPr>
+              <a:spcAft>
+                <a:spcPts val="600"/>
+              </a:spcAft>
+            </a:pPr>
+            <a:r>
+              <a:rPr sz="1500">
+                <a:solidFill>
+                  <a:srgbClr val="22282E"/>
+                </a:solidFill>
+              </a:rPr>
+              <a:t>•  justificas el orden de dificultad con base en las debilidades residuales.</a:t>
             </a:r>
           </a:p>
         </p:txBody>
@@ -3347,7 +3334,7 @@
                   <a:srgbClr val="0B3D2E"/>
                 </a:solidFill>
               </a:rPr>
-              <a:t>❓ Preguntas frecuentes</a:t>
+              <a:t>⚠️ Errores comunes</a:t>
             </a:r>
           </a:p>
         </p:txBody>
@@ -3385,82 +3372,67 @@
                   <a:srgbClr val="22282E"/>
                 </a:solidFill>
               </a:rPr>
-              <a:t>•  ❓ ¿Con todas activas es imposible explotar? No, pero sube mucho el coste: normalmente hace falta</a:t>
-            </a:r>
-          </a:p>
-          <a:p>
-            <a:pPr>
-              <a:spcAft>
-                <a:spcPts val="600"/>
-              </a:spcAft>
-            </a:pPr>
-            <a:r>
-              <a:rPr sz="1500">
-                <a:solidFill>
-                  <a:srgbClr val="22282E"/>
-                </a:solidFill>
-              </a:rPr>
-              <a:t>•  una fuga de información y cadenas ROP.</a:t>
-            </a:r>
-          </a:p>
-          <a:p>
-            <a:pPr>
-              <a:spcAft>
-                <a:spcPts val="600"/>
-              </a:spcAft>
-            </a:pPr>
-            <a:r>
-              <a:rPr sz="1500">
-                <a:solidFill>
-                  <a:srgbClr val="22282E"/>
-                </a:solidFill>
-              </a:rPr>
-              <a:t>•  ❓ ¿El canary protege variables locales? Protege la dirección de retorno; una escritura dirigida</a:t>
-            </a:r>
-          </a:p>
-          <a:p>
-            <a:pPr>
-              <a:spcAft>
-                <a:spcPts val="600"/>
-              </a:spcAft>
-            </a:pPr>
-            <a:r>
-              <a:rPr sz="1500">
-                <a:solidFill>
-                  <a:srgbClr val="22282E"/>
-                </a:solidFill>
-              </a:rPr>
-              <a:t>•  que salte el canary aún puede corromper otras cosas.</a:t>
-            </a:r>
-          </a:p>
-          <a:p>
-            <a:pPr>
-              <a:spcAft>
-                <a:spcPts val="600"/>
-              </a:spcAft>
-            </a:pPr>
-            <a:r>
-              <a:rPr sz="1500">
-                <a:solidFill>
-                  <a:srgbClr val="22282E"/>
-                </a:solidFill>
-              </a:rPr>
-              <a:t>•  ❓ ¿PIE y ASLR son lo mismo? No: ASLR aleatoriza librerías/stack/heap; PIE permite aleatorizar</a:t>
-            </a:r>
-          </a:p>
-          <a:p>
-            <a:pPr>
-              <a:spcAft>
-                <a:spcPts val="600"/>
-              </a:spcAft>
-            </a:pPr>
-            <a:r>
-              <a:rPr sz="1500">
-                <a:solidFill>
-                  <a:srgbClr val="22282E"/>
-                </a:solidFill>
-              </a:rPr>
-              <a:t>•  además el propio ejecutable.</a:t>
+              <a:t>•  stack smashing detected — El canary detectó tu overflow; necesitas filtrarlo primero</a:t>
+            </a:r>
+          </a:p>
+          <a:p>
+            <a:pPr>
+              <a:spcAft>
+                <a:spcPts val="600"/>
+              </a:spcAft>
+            </a:pPr>
+            <a:r>
+              <a:rPr sz="1500">
+                <a:solidFill>
+                  <a:srgbClr val="22282E"/>
+                </a:solidFill>
+              </a:rPr>
+              <a:t>•  Direcciones cambian cada corrida — ASLR/PIE activos; hace falta un info leak</a:t>
+            </a:r>
+          </a:p>
+          <a:p>
+            <a:pPr>
+              <a:spcAft>
+                <a:spcPts val="600"/>
+              </a:spcAft>
+            </a:pPr>
+            <a:r>
+              <a:rPr sz="1500">
+                <a:solidFill>
+                  <a:srgbClr val="22282E"/>
+                </a:solidFill>
+              </a:rPr>
+              <a:t>•  Shellcode en stack no ejecuta — NX activo; usa ret2libc o ROP</a:t>
+            </a:r>
+          </a:p>
+          <a:p>
+            <a:pPr>
+              <a:spcAft>
+                <a:spcPts val="600"/>
+              </a:spcAft>
+            </a:pPr>
+            <a:r>
+              <a:rPr sz="1500">
+                <a:solidFill>
+                  <a:srgbClr val="22282E"/>
+                </a:solidFill>
+              </a:rPr>
+              <a:t>•  checksec dice "No canary" pero crashea igual — Otra mitigación (NX/PIE) está frenando el exploit</a:t>
+            </a:r>
+          </a:p>
+          <a:p>
+            <a:pPr>
+              <a:spcAft>
+                <a:spcPts val="600"/>
+              </a:spcAft>
+            </a:pPr>
+            <a:r>
+              <a:rPr sz="1500">
+                <a:solidFill>
+                  <a:srgbClr val="22282E"/>
+                </a:solidFill>
+              </a:rPr>
+              <a:t>•  Olvidas revertir ASLR a 2 — Deja la VM menos segura; restaura tras el laboratorio</a:t>
             </a:r>
           </a:p>
         </p:txBody>
@@ -3511,7 +3483,7 @@
                   <a:srgbClr val="0B3D2E"/>
                 </a:solidFill>
               </a:rPr>
-              <a:t>🔗 Referencias</a:t>
+              <a:t>❓ Preguntas frecuentes</a:t>
             </a:r>
           </a:p>
         </p:txBody>
@@ -3549,6 +3521,170 @@
                   <a:srgbClr val="22282E"/>
                 </a:solidFill>
               </a:rPr>
+              <a:t>•  ❓ ¿Con todas activas es imposible explotar? No, pero sube mucho el coste: normalmente hace falta</a:t>
+            </a:r>
+          </a:p>
+          <a:p>
+            <a:pPr>
+              <a:spcAft>
+                <a:spcPts val="600"/>
+              </a:spcAft>
+            </a:pPr>
+            <a:r>
+              <a:rPr sz="1500">
+                <a:solidFill>
+                  <a:srgbClr val="22282E"/>
+                </a:solidFill>
+              </a:rPr>
+              <a:t>•  una fuga de información y cadenas ROP.</a:t>
+            </a:r>
+          </a:p>
+          <a:p>
+            <a:pPr>
+              <a:spcAft>
+                <a:spcPts val="600"/>
+              </a:spcAft>
+            </a:pPr>
+            <a:r>
+              <a:rPr sz="1500">
+                <a:solidFill>
+                  <a:srgbClr val="22282E"/>
+                </a:solidFill>
+              </a:rPr>
+              <a:t>•  ❓ ¿El canary protege variables locales? Protege la dirección de retorno; una escritura dirigida</a:t>
+            </a:r>
+          </a:p>
+          <a:p>
+            <a:pPr>
+              <a:spcAft>
+                <a:spcPts val="600"/>
+              </a:spcAft>
+            </a:pPr>
+            <a:r>
+              <a:rPr sz="1500">
+                <a:solidFill>
+                  <a:srgbClr val="22282E"/>
+                </a:solidFill>
+              </a:rPr>
+              <a:t>•  que salte el canary aún puede corromper otras cosas.</a:t>
+            </a:r>
+          </a:p>
+          <a:p>
+            <a:pPr>
+              <a:spcAft>
+                <a:spcPts val="600"/>
+              </a:spcAft>
+            </a:pPr>
+            <a:r>
+              <a:rPr sz="1500">
+                <a:solidFill>
+                  <a:srgbClr val="22282E"/>
+                </a:solidFill>
+              </a:rPr>
+              <a:t>•  ❓ ¿PIE y ASLR son lo mismo? No: ASLR aleatoriza librerías/stack/heap; PIE permite aleatorizar</a:t>
+            </a:r>
+          </a:p>
+          <a:p>
+            <a:pPr>
+              <a:spcAft>
+                <a:spcPts val="600"/>
+              </a:spcAft>
+            </a:pPr>
+            <a:r>
+              <a:rPr sz="1500">
+                <a:solidFill>
+                  <a:srgbClr val="22282E"/>
+                </a:solidFill>
+              </a:rPr>
+              <a:t>•  además el propio ejecutable.</a:t>
+            </a:r>
+          </a:p>
+        </p:txBody>
+      </p:sp>
+    </p:spTree>
+  </p:cSld>
+  <p:clrMapOvr>
+    <a:masterClrMapping/>
+  </p:clrMapOvr>
+</p:sld>
+</file>
+
+<file path=ppt/slides/slide13.xml><?xml version="1.0" encoding="utf-8"?>
+<p:sld xmlns:a="http://schemas.openxmlformats.org/drawingml/2006/main" xmlns:p="http://schemas.openxmlformats.org/presentationml/2006/main" xmlns:r="http://schemas.openxmlformats.org/officeDocument/2006/relationships">
+  <p:cSld>
+    <p:spTree>
+      <p:nvGrpSpPr>
+        <p:cNvPr id="1" name=""/>
+        <p:cNvGrpSpPr/>
+        <p:nvPr/>
+      </p:nvGrpSpPr>
+      <p:grpSpPr/>
+      <p:sp>
+        <p:nvSpPr>
+          <p:cNvPr id="2" name="TextBox 1"/>
+          <p:cNvSpPr txBox="1"/>
+          <p:nvPr/>
+        </p:nvSpPr>
+        <p:spPr>
+          <a:xfrm>
+            <a:off x="457200" y="320040"/>
+            <a:ext cx="8229600" cy="822960"/>
+          </a:xfrm>
+          <a:prstGeom prst="rect">
+            <a:avLst/>
+          </a:prstGeom>
+          <a:noFill/>
+        </p:spPr>
+        <p:txBody>
+          <a:bodyPr wrap="square">
+            <a:spAutoFit/>
+          </a:bodyPr>
+          <a:lstStyle/>
+          <a:p>
+            <a:r>
+              <a:rPr sz="2600" b="1">
+                <a:solidFill>
+                  <a:srgbClr val="0B3D2E"/>
+                </a:solidFill>
+              </a:rPr>
+              <a:t>🔗 Referencias</a:t>
+            </a:r>
+          </a:p>
+        </p:txBody>
+      </p:sp>
+      <p:sp>
+        <p:nvSpPr>
+          <p:cNvPr id="3" name="TextBox 2"/>
+          <p:cNvSpPr txBox="1"/>
+          <p:nvPr/>
+        </p:nvSpPr>
+        <p:spPr>
+          <a:xfrm>
+            <a:off x="457200" y="1280160"/>
+            <a:ext cx="8229600" cy="4937760"/>
+          </a:xfrm>
+          <a:prstGeom prst="rect">
+            <a:avLst/>
+          </a:prstGeom>
+          <a:noFill/>
+        </p:spPr>
+        <p:txBody>
+          <a:bodyPr wrap="square">
+            <a:spAutoFit/>
+          </a:bodyPr>
+          <a:lstStyle/>
+          <a:p>
+            <a:pPr>
+              <a:spcAft>
+                <a:spcPts val="600"/>
+              </a:spcAft>
+            </a:pPr>
+            <a:r>
+              <a:rPr sz="1500">
+                <a:solidFill>
+                  <a:srgbClr val="22282E"/>
+                </a:solidFill>
+              </a:rPr>
               <a:t>•  Andriesse, D. Practical Binary Analysis. No Starch Press.</a:t>
             </a:r>
           </a:p>
@@ -3599,6 +3735,81 @@
           </a:p>
         </p:txBody>
       </p:sp>
+    </p:spTree>
+  </p:cSld>
+  <p:clrMapOvr>
+    <a:masterClrMapping/>
+  </p:clrMapOvr>
+</p:sld>
+</file>
+
+<file path=ppt/slides/slide14.xml><?xml version="1.0" encoding="utf-8"?>
+<p:sld xmlns:a="http://schemas.openxmlformats.org/drawingml/2006/main" xmlns:p="http://schemas.openxmlformats.org/presentationml/2006/main" xmlns:r="http://schemas.openxmlformats.org/officeDocument/2006/relationships">
+  <p:cSld>
+    <p:spTree>
+      <p:nvGrpSpPr>
+        <p:cNvPr id="1" name=""/>
+        <p:cNvGrpSpPr/>
+        <p:nvPr/>
+      </p:nvGrpSpPr>
+      <p:grpSpPr/>
+      <p:sp>
+        <p:nvSpPr>
+          <p:cNvPr id="2" name="TextBox 1"/>
+          <p:cNvSpPr txBox="1"/>
+          <p:nvPr/>
+        </p:nvSpPr>
+        <p:spPr>
+          <a:xfrm>
+            <a:off x="457200" y="274320"/>
+            <a:ext cx="8229600" cy="640080"/>
+          </a:xfrm>
+          <a:prstGeom prst="rect">
+            <a:avLst/>
+          </a:prstGeom>
+          <a:noFill/>
+        </p:spPr>
+        <p:txBody>
+          <a:bodyPr wrap="square">
+            <a:spAutoFit/>
+          </a:bodyPr>
+          <a:lstStyle/>
+          <a:p>
+            <a:r>
+              <a:rPr sz="2200" b="1">
+                <a:solidFill>
+                  <a:srgbClr val="0B3D2E"/>
+                </a:solidFill>
+              </a:rPr>
+              <a:t>Diagrama de la clase</a:t>
+            </a:r>
+          </a:p>
+        </p:txBody>
+      </p:sp>
+      <p:pic>
+        <p:nvPicPr>
+          <p:cNvPr id="3" name="Picture 2" descr="4d0c7fc37720409d.png"/>
+          <p:cNvPicPr>
+            <a:picLocks noChangeAspect="1"/>
+          </p:cNvPicPr>
+          <p:nvPr/>
+        </p:nvPicPr>
+        <p:blipFill>
+          <a:blip r:embed="rId2"/>
+          <a:stretch>
+            <a:fillRect/>
+          </a:stretch>
+        </p:blipFill>
+        <p:spPr>
+          <a:xfrm>
+            <a:off x="2449954" y="1097280"/>
+            <a:ext cx="4244092" cy="5303520"/>
+          </a:xfrm>
+          <a:prstGeom prst="rect">
+            <a:avLst/>
+          </a:prstGeom>
+        </p:spPr>
+      </p:pic>
     </p:spTree>
   </p:cSld>
   <p:clrMapOvr>
@@ -4137,7 +4348,7 @@
                   <a:srgbClr val="0B3D2E"/>
                 </a:solidFill>
               </a:rPr>
-              <a:t>📖 Definiciones y características</a:t>
+              <a:t>🧠 Explicación en profundidad</a:t>
             </a:r>
           </a:p>
         </p:txBody>
@@ -4175,97 +4386,97 @@
                   <a:srgbClr val="22282E"/>
                 </a:solidFill>
               </a:rPr>
-              <a:t>•  ASLR: aleatoriza las direcciones base de librerías, stack y heap en cada ejecución. Clave: una</a:t>
-            </a:r>
-          </a:p>
-          <a:p>
-            <a:pPr>
-              <a:spcAft>
-                <a:spcPts val="600"/>
-              </a:spcAft>
-            </a:pPr>
-            <a:r>
-              <a:rPr sz="1500">
-                <a:solidFill>
-                  <a:srgbClr val="22282E"/>
-                </a:solidFill>
-              </a:rPr>
-              <a:t>•  fuga de dirección (info leak) lo derrota al revelar una base.</a:t>
-            </a:r>
-          </a:p>
-          <a:p>
-            <a:pPr>
-              <a:spcAft>
-                <a:spcPts val="600"/>
-              </a:spcAft>
-            </a:pPr>
-            <a:r>
-              <a:rPr sz="1500">
-                <a:solidFill>
-                  <a:srgbClr val="22282E"/>
-                </a:solidFill>
-              </a:rPr>
-              <a:t>•  DEP/NX (No-eXecute): marca páginas de datos como no ejecutables. Clave: impide shellcode en</a:t>
-            </a:r>
-          </a:p>
-          <a:p>
-            <a:pPr>
-              <a:spcAft>
-                <a:spcPts val="600"/>
-              </a:spcAft>
-            </a:pPr>
-            <a:r>
-              <a:rPr sz="1500">
-                <a:solidFill>
-                  <a:srgbClr val="22282E"/>
-                </a:solidFill>
-              </a:rPr>
-              <a:t>•  stack/heap; se evade reutilizando código (ret2libc, ROP).</a:t>
-            </a:r>
-          </a:p>
-          <a:p>
-            <a:pPr>
-              <a:spcAft>
-                <a:spcPts val="600"/>
-              </a:spcAft>
-            </a:pPr>
-            <a:r>
-              <a:rPr sz="1500">
-                <a:solidFill>
-                  <a:srgbClr val="22282E"/>
-                </a:solidFill>
-              </a:rPr>
-              <a:t>•  Stack canary: valor aleatorio colocado antes del retorno; se verifica en el epílogo. Clave: un</a:t>
-            </a:r>
-          </a:p>
-          <a:p>
-            <a:pPr>
-              <a:spcAft>
-                <a:spcPts val="600"/>
-              </a:spcAft>
-            </a:pPr>
-            <a:r>
-              <a:rPr sz="1500">
-                <a:solidFill>
-                  <a:srgbClr val="22282E"/>
-                </a:solidFill>
-              </a:rPr>
-              <a:t>•  overflow lineal lo altera y aborta el programa (stack smashing detected).</a:t>
-            </a:r>
-          </a:p>
-          <a:p>
-            <a:pPr>
-              <a:spcAft>
-                <a:spcPts val="600"/>
-              </a:spcAft>
-            </a:pPr>
-            <a:r>
-              <a:rPr sz="1500">
-                <a:solidFill>
-                  <a:srgbClr val="22282E"/>
-                </a:solidFill>
-              </a:rPr>
-              <a:t>•  PIE: compila el ejecutable como posicionable, permitiendo aleatorizar su base con ASLR. Clave:</a:t>
+              <a:t>•  El buffer overflow "de manual" —desbordar, inyectar shellcode en la pila y saltar a él— dejó de</a:t>
+            </a:r>
+          </a:p>
+          <a:p>
+            <a:pPr>
+              <a:spcAft>
+                <a:spcPts val="600"/>
+              </a:spcAft>
+            </a:pPr>
+            <a:r>
+              <a:rPr sz="1500">
+                <a:solidFill>
+                  <a:srgbClr val="22282E"/>
+                </a:solidFill>
+              </a:rPr>
+              <a:t>•  funcionar hace dos décadas gracias a un conjunto de mitigaciones que hoy vienen activas por</a:t>
+            </a:r>
+          </a:p>
+          <a:p>
+            <a:pPr>
+              <a:spcAft>
+                <a:spcPts val="600"/>
+              </a:spcAft>
+            </a:pPr>
+            <a:r>
+              <a:rPr sz="1500">
+                <a:solidFill>
+                  <a:srgbClr val="22282E"/>
+                </a:solidFill>
+              </a:rPr>
+              <a:t>•  defecto. Entenderlas es imprescindible por dos razones: para saber qué impide cada una (y por</a:t>
+            </a:r>
+          </a:p>
+          <a:p>
+            <a:pPr>
+              <a:spcAft>
+                <a:spcPts val="600"/>
+              </a:spcAft>
+            </a:pPr>
+            <a:r>
+              <a:rPr sz="1500">
+                <a:solidFill>
+                  <a:srgbClr val="22282E"/>
+                </a:solidFill>
+              </a:rPr>
+              <a:t>•  tanto qué técnica de bypass hace falta) y para leer la postura de seguridad de un binario. Cada</a:t>
+            </a:r>
+          </a:p>
+          <a:p>
+            <a:pPr>
+              <a:spcAft>
+                <a:spcPts val="600"/>
+              </a:spcAft>
+            </a:pPr>
+            <a:r>
+              <a:rPr sz="1500">
+                <a:solidFill>
+                  <a:srgbClr val="22282E"/>
+                </a:solidFill>
+              </a:rPr>
+              <a:t>•  defensa ataca un eslabón distinto de la cadena de explotación, y por eso la explotación moderna</a:t>
+            </a:r>
+          </a:p>
+          <a:p>
+            <a:pPr>
+              <a:spcAft>
+                <a:spcPts val="600"/>
+              </a:spcAft>
+            </a:pPr>
+            <a:r>
+              <a:rPr sz="1500">
+                <a:solidFill>
+                  <a:srgbClr val="22282E"/>
+                </a:solidFill>
+              </a:rPr>
+              <a:t>•  consiste en combinar bypasses, no en un solo truco.</a:t>
+            </a:r>
+          </a:p>
+          <a:p>
+            <a:pPr>
+              <a:spcAft>
+                <a:spcPts val="600"/>
+              </a:spcAft>
+            </a:pPr>
+            <a:r>
+              <a:rPr sz="1500">
+                <a:solidFill>
+                  <a:srgbClr val="22282E"/>
+                </a:solidFill>
+              </a:rPr>
+              <a:t>•  DEP/NX (Data Execution Prevention / No-eXecute) marca las regiones de datos —incluida la</a:t>
             </a:r>
           </a:p>
         </p:txBody>
@@ -4316,7 +4527,7 @@
                   <a:srgbClr val="0B3D2E"/>
                 </a:solidFill>
               </a:rPr>
-              <a:t>🧰 Herramientas y preparación</a:t>
+              <a:t>📖 Definiciones y características</a:t>
             </a:r>
           </a:p>
         </p:txBody>
@@ -4354,37 +4565,97 @@
                   <a:srgbClr val="22282E"/>
                 </a:solidFill>
               </a:rPr>
-              <a:t>•  pip install pwntools          # trae checksec</a:t>
-            </a:r>
-          </a:p>
-          <a:p>
-            <a:pPr>
-              <a:spcAft>
-                <a:spcPts val="600"/>
-              </a:spcAft>
-            </a:pPr>
-            <a:r>
-              <a:rPr sz="1500">
-                <a:solidFill>
-                  <a:srgbClr val="22282E"/>
-                </a:solidFill>
-              </a:rPr>
-              <a:t>•  sudo apt install -y gcc</a:t>
-            </a:r>
-          </a:p>
-          <a:p>
-            <a:pPr>
-              <a:spcAft>
-                <a:spcPts val="600"/>
-              </a:spcAft>
-            </a:pPr>
-            <a:r>
-              <a:rPr sz="1500">
-                <a:solidFill>
-                  <a:srgbClr val="22282E"/>
-                </a:solidFill>
-              </a:rPr>
-              <a:t>•  cat /proc/sys/kernel/randomizevaspace   # 2 = ASLR completo</a:t>
+              <a:t>•  ASLR: aleatoriza las direcciones base de librerías, stack y heap en cada ejecución. Clave: una</a:t>
+            </a:r>
+          </a:p>
+          <a:p>
+            <a:pPr>
+              <a:spcAft>
+                <a:spcPts val="600"/>
+              </a:spcAft>
+            </a:pPr>
+            <a:r>
+              <a:rPr sz="1500">
+                <a:solidFill>
+                  <a:srgbClr val="22282E"/>
+                </a:solidFill>
+              </a:rPr>
+              <a:t>•  fuga de dirección (info leak) lo derrota al revelar una base.</a:t>
+            </a:r>
+          </a:p>
+          <a:p>
+            <a:pPr>
+              <a:spcAft>
+                <a:spcPts val="600"/>
+              </a:spcAft>
+            </a:pPr>
+            <a:r>
+              <a:rPr sz="1500">
+                <a:solidFill>
+                  <a:srgbClr val="22282E"/>
+                </a:solidFill>
+              </a:rPr>
+              <a:t>•  DEP/NX (No-eXecute): marca páginas de datos como no ejecutables. Clave: impide shellcode en</a:t>
+            </a:r>
+          </a:p>
+          <a:p>
+            <a:pPr>
+              <a:spcAft>
+                <a:spcPts val="600"/>
+              </a:spcAft>
+            </a:pPr>
+            <a:r>
+              <a:rPr sz="1500">
+                <a:solidFill>
+                  <a:srgbClr val="22282E"/>
+                </a:solidFill>
+              </a:rPr>
+              <a:t>•  stack/heap; se evade reutilizando código (ret2libc, ROP).</a:t>
+            </a:r>
+          </a:p>
+          <a:p>
+            <a:pPr>
+              <a:spcAft>
+                <a:spcPts val="600"/>
+              </a:spcAft>
+            </a:pPr>
+            <a:r>
+              <a:rPr sz="1500">
+                <a:solidFill>
+                  <a:srgbClr val="22282E"/>
+                </a:solidFill>
+              </a:rPr>
+              <a:t>•  Stack canary: valor aleatorio colocado antes del retorno; se verifica en el epílogo. Clave: un</a:t>
+            </a:r>
+          </a:p>
+          <a:p>
+            <a:pPr>
+              <a:spcAft>
+                <a:spcPts val="600"/>
+              </a:spcAft>
+            </a:pPr>
+            <a:r>
+              <a:rPr sz="1500">
+                <a:solidFill>
+                  <a:srgbClr val="22282E"/>
+                </a:solidFill>
+              </a:rPr>
+              <a:t>•  overflow lineal lo altera y aborta el programa (stack smashing detected).</a:t>
+            </a:r>
+          </a:p>
+          <a:p>
+            <a:pPr>
+              <a:spcAft>
+                <a:spcPts val="600"/>
+              </a:spcAft>
+            </a:pPr>
+            <a:r>
+              <a:rPr sz="1500">
+                <a:solidFill>
+                  <a:srgbClr val="22282E"/>
+                </a:solidFill>
+              </a:rPr>
+              <a:t>•  PIE: compila el ejecutable como posicionable, permitiendo aleatorizar su base con ASLR. Clave:</a:t>
             </a:r>
           </a:p>
         </p:txBody>
@@ -4435,7 +4706,7 @@
                   <a:srgbClr val="0B3D2E"/>
                 </a:solidFill>
               </a:rPr>
-              <a:t>🧪 Laboratorio guiado</a:t>
+              <a:t>📔 Glosario</a:t>
             </a:r>
           </a:p>
         </p:txBody>
@@ -4473,97 +4744,97 @@
                   <a:srgbClr val="22282E"/>
                 </a:solidFill>
               </a:rPr>
-              <a:t>•  Compila el mismo vuln.c con distintas protecciones y compáralas:</a:t>
-            </a:r>
-          </a:p>
-          <a:p>
-            <a:pPr>
-              <a:spcAft>
-                <a:spcPts val="600"/>
-              </a:spcAft>
-            </a:pPr>
-            <a:r>
-              <a:rPr sz="1500">
-                <a:solidFill>
-                  <a:srgbClr val="22282E"/>
-                </a:solidFill>
-              </a:rPr>
-              <a:t>•  gcc vuln.c -o vfull                                   # todas las mitigaciones por defecto</a:t>
-            </a:r>
-          </a:p>
-          <a:p>
-            <a:pPr>
-              <a:spcAft>
-                <a:spcPts val="600"/>
-              </a:spcAft>
-            </a:pPr>
-            <a:r>
-              <a:rPr sz="1500">
-                <a:solidFill>
-                  <a:srgbClr val="22282E"/>
-                </a:solidFill>
-              </a:rPr>
-              <a:t>•  gcc -fno-stack-protector vuln.c -o vnocanary</a:t>
-            </a:r>
-          </a:p>
-          <a:p>
-            <a:pPr>
-              <a:spcAft>
-                <a:spcPts val="600"/>
-              </a:spcAft>
-            </a:pPr>
-            <a:r>
-              <a:rPr sz="1500">
-                <a:solidFill>
-                  <a:srgbClr val="22282E"/>
-                </a:solidFill>
-              </a:rPr>
-              <a:t>•  gcc -no-pie -fno-stack-protector vuln.c -o vnopie</a:t>
-            </a:r>
-          </a:p>
-          <a:p>
-            <a:pPr>
-              <a:spcAft>
-                <a:spcPts val="600"/>
-              </a:spcAft>
-            </a:pPr>
-            <a:r>
-              <a:rPr sz="1500">
-                <a:solidFill>
-                  <a:srgbClr val="22282E"/>
-                </a:solidFill>
-              </a:rPr>
-              <a:t>•  gcc -z execstack -no-pie -fno-stack-protector vuln.c -o vopen</a:t>
-            </a:r>
-          </a:p>
-          <a:p>
-            <a:pPr>
-              <a:spcAft>
-                <a:spcPts val="600"/>
-              </a:spcAft>
-            </a:pPr>
-            <a:r>
-              <a:rPr sz="1500">
-                <a:solidFill>
-                  <a:srgbClr val="22282E"/>
-                </a:solidFill>
-              </a:rPr>
-              <a:t>•  Audita cada uno:</a:t>
-            </a:r>
-          </a:p>
-          <a:p>
-            <a:pPr>
-              <a:spcAft>
-                <a:spcPts val="600"/>
-              </a:spcAft>
-            </a:pPr>
-            <a:r>
-              <a:rPr sz="1500">
-                <a:solidFill>
-                  <a:srgbClr val="22282E"/>
-                </a:solidFill>
-              </a:rPr>
-              <a:t>•  for b in vfull vnocanary vnopie vopen; do echo "== $b =="; checksec --file=$b; done</a:t>
+              <a:t>•  Término — Definición concisa</a:t>
+            </a:r>
+          </a:p>
+          <a:p>
+            <a:pPr>
+              <a:spcAft>
+                <a:spcPts val="600"/>
+              </a:spcAft>
+            </a:pPr>
+            <a:r>
+              <a:rPr sz="1500">
+                <a:solidFill>
+                  <a:srgbClr val="22282E"/>
+                </a:solidFill>
+              </a:rPr>
+              <a:t>•  Mitigación — Defensa del compilador o del SO contra la explotación</a:t>
+            </a:r>
+          </a:p>
+          <a:p>
+            <a:pPr>
+              <a:spcAft>
+                <a:spcPts val="600"/>
+              </a:spcAft>
+            </a:pPr>
+            <a:r>
+              <a:rPr sz="1500">
+                <a:solidFill>
+                  <a:srgbClr val="22282E"/>
+                </a:solidFill>
+              </a:rPr>
+              <a:t>•  DEP / NX — Marca los datos como no ejecutables (bit NX)</a:t>
+            </a:r>
+          </a:p>
+          <a:p>
+            <a:pPr>
+              <a:spcAft>
+                <a:spcPts val="600"/>
+              </a:spcAft>
+            </a:pPr>
+            <a:r>
+              <a:rPr sz="1500">
+                <a:solidFill>
+                  <a:srgbClr val="22282E"/>
+                </a:solidFill>
+              </a:rPr>
+              <a:t>•  Reutilización de código — ret2libc/ROP, respuesta a NX</a:t>
+            </a:r>
+          </a:p>
+          <a:p>
+            <a:pPr>
+              <a:spcAft>
+                <a:spcPts val="600"/>
+              </a:spcAft>
+            </a:pPr>
+            <a:r>
+              <a:rPr sz="1500">
+                <a:solidFill>
+                  <a:srgbClr val="22282E"/>
+                </a:solidFill>
+              </a:rPr>
+              <a:t>•  Stack canary — Valor secreto que detecta la sobrescritura de la pila</a:t>
+            </a:r>
+          </a:p>
+          <a:p>
+            <a:pPr>
+              <a:spcAft>
+                <a:spcPts val="600"/>
+              </a:spcAft>
+            </a:pPr>
+            <a:r>
+              <a:rPr sz="1500">
+                <a:solidFill>
+                  <a:srgbClr val="22282E"/>
+                </a:solidFill>
+              </a:rPr>
+              <a:t>•  Stack smashing detected — Mensaje al fallar la comprobación del canario</a:t>
+            </a:r>
+          </a:p>
+          <a:p>
+            <a:pPr>
+              <a:spcAft>
+                <a:spcPts val="600"/>
+              </a:spcAft>
+            </a:pPr>
+            <a:r>
+              <a:rPr sz="1500">
+                <a:solidFill>
+                  <a:srgbClr val="22282E"/>
+                </a:solidFill>
+              </a:rPr>
+              <a:t>•  Leak del canario — Leer el canario para reescribirlo y evadirlo</a:t>
             </a:r>
           </a:p>
         </p:txBody>
@@ -4614,7 +4885,7 @@
                   <a:srgbClr val="0B3D2E"/>
                 </a:solidFill>
               </a:rPr>
-              <a:t>✍️ Ejercicios</a:t>
+              <a:t>🧪 Laboratorio guiado</a:t>
             </a:r>
           </a:p>
         </p:txBody>
@@ -4652,82 +4923,97 @@
                   <a:srgbClr val="22282E"/>
                 </a:solidFill>
               </a:rPr>
-              <a:t>•  Rellena una tabla mitigación → ataque que bloquea → debilidad residual.</a:t>
-            </a:r>
-          </a:p>
-          <a:p>
-            <a:pPr>
-              <a:spcAft>
-                <a:spcPts val="600"/>
-              </a:spcAft>
-            </a:pPr>
-            <a:r>
-              <a:rPr sz="1500">
-                <a:solidFill>
-                  <a:srgbClr val="22282E"/>
-                </a:solidFill>
-              </a:rPr>
-              <a:t>•  Explica por qué NX no impide ret2libc.</a:t>
-            </a:r>
-          </a:p>
-          <a:p>
-            <a:pPr>
-              <a:spcAft>
-                <a:spcPts val="600"/>
-              </a:spcAft>
-            </a:pPr>
-            <a:r>
-              <a:rPr sz="1500">
-                <a:solidFill>
-                  <a:srgbClr val="22282E"/>
-                </a:solidFill>
-              </a:rPr>
-              <a:t>•  Muestra en el desensamblado dónde se lee y compara el canary.</a:t>
-            </a:r>
-          </a:p>
-          <a:p>
-            <a:pPr>
-              <a:spcAft>
-                <a:spcPts val="600"/>
-              </a:spcAft>
-            </a:pPr>
-            <a:r>
-              <a:rPr sz="1500">
-                <a:solidFill>
-                  <a:srgbClr val="22282E"/>
-                </a:solidFill>
-              </a:rPr>
-              <a:t>•  Diferencia Partial RELRO de Full RELRO y su impacto en ataques a la GOT.</a:t>
-            </a:r>
-          </a:p>
-          <a:p>
-            <a:pPr>
-              <a:spcAft>
-                <a:spcPts val="600"/>
-              </a:spcAft>
-            </a:pPr>
-            <a:r>
-              <a:rPr sz="1500">
-                <a:solidFill>
-                  <a:srgbClr val="22282E"/>
-                </a:solidFill>
-              </a:rPr>
-              <a:t>•  Con ASLR activo, ejecuta 3 veces y registra la base de libc para ver la aleatorización.</a:t>
-            </a:r>
-          </a:p>
-          <a:p>
-            <a:pPr>
-              <a:spcAft>
-                <a:spcPts val="600"/>
-              </a:spcAft>
-            </a:pPr>
-            <a:r>
-              <a:rPr sz="1500">
-                <a:solidFill>
-                  <a:srgbClr val="22282E"/>
-                </a:solidFill>
-              </a:rPr>
-              <a:t>•  ¿Por qué PIE eleva el coste incluso con una fuga de libc?</a:t>
+              <a:t>•  Compila el mismo vuln.c con distintas protecciones y compáralas:</a:t>
+            </a:r>
+          </a:p>
+          <a:p>
+            <a:pPr>
+              <a:spcAft>
+                <a:spcPts val="600"/>
+              </a:spcAft>
+            </a:pPr>
+            <a:r>
+              <a:rPr sz="1500">
+                <a:solidFill>
+                  <a:srgbClr val="22282E"/>
+                </a:solidFill>
+              </a:rPr>
+              <a:t>•  Audita cada uno:</a:t>
+            </a:r>
+          </a:p>
+          <a:p>
+            <a:pPr>
+              <a:spcAft>
+                <a:spcPts val="600"/>
+              </a:spcAft>
+            </a:pPr>
+            <a:r>
+              <a:rPr sz="1500">
+                <a:solidFill>
+                  <a:srgbClr val="22282E"/>
+                </a:solidFill>
+              </a:rPr>
+              <a:t>•  Observa el canary en acción: alimenta un overflow largo a vfull y verás  stack smashing detected .</a:t>
+            </a:r>
+          </a:p>
+          <a:p>
+            <a:pPr>
+              <a:spcAft>
+                <a:spcPts val="600"/>
+              </a:spcAft>
+            </a:pPr>
+            <a:r>
+              <a:rPr sz="1500">
+                <a:solidFill>
+                  <a:srgbClr val="22282E"/>
+                </a:solidFill>
+              </a:rPr>
+              <a:t>•  Comprueba ASLR: ejecuta ldd vfull dos veces con ASLR activo y nota que la base de libc cambia</a:t>
+            </a:r>
+          </a:p>
+          <a:p>
+            <a:pPr>
+              <a:spcAft>
+                <a:spcPts val="600"/>
+              </a:spcAft>
+            </a:pPr>
+            <a:r>
+              <a:rPr sz="1500">
+                <a:solidFill>
+                  <a:srgbClr val="22282E"/>
+                </a:solidFill>
+              </a:rPr>
+              <a:t>•  (o usa cat /proc/self/maps en un pequeño script).</a:t>
+            </a:r>
+          </a:p>
+          <a:p>
+            <a:pPr>
+              <a:spcAft>
+                <a:spcPts val="600"/>
+              </a:spcAft>
+            </a:pPr>
+            <a:r>
+              <a:rPr sz="1500">
+                <a:solidFill>
+                  <a:srgbClr val="22282E"/>
+                </a:solidFill>
+              </a:rPr>
+              <a:t>•  Desactiva ASLR temporalmente y confirma que las direcciones se estabilizan:</a:t>
+            </a:r>
+          </a:p>
+          <a:p>
+            <a:pPr>
+              <a:spcAft>
+                <a:spcPts val="600"/>
+              </a:spcAft>
+            </a:pPr>
+            <a:r>
+              <a:rPr sz="1500">
+                <a:solidFill>
+                  <a:srgbClr val="22282E"/>
+                </a:solidFill>
+              </a:rPr>
+              <a:t>•  Desensambla el prólogo/epílogo de vfull y localiza la carga del canary desde fs:0x28 y su</a:t>
             </a:r>
           </a:p>
         </p:txBody>
@@ -4778,7 +5064,7 @@
                   <a:srgbClr val="0B3D2E"/>
                 </a:solidFill>
               </a:rPr>
-              <a:t>📝 Reto verificable</a:t>
+              <a:t>✍️ Ejercicios</a:t>
             </a:r>
           </a:p>
         </p:txBody>
@@ -4816,52 +5102,82 @@
                   <a:srgbClr val="22282E"/>
                 </a:solidFill>
               </a:rPr>
-              <a:t>•  Genera cuatro binarios del mismo fuente con combinaciones distintas de protecciones y entrega la</a:t>
-            </a:r>
-          </a:p>
-          <a:p>
-            <a:pPr>
-              <a:spcAft>
-                <a:spcPts val="600"/>
-              </a:spcAft>
-            </a:pPr>
-            <a:r>
-              <a:rPr sz="1500">
-                <a:solidFill>
-                  <a:srgbClr val="22282E"/>
-                </a:solidFill>
-              </a:rPr>
-              <a:t>•  salida de checksec de cada uno, clasificando cuál es más difícil de explotar y por qué.</a:t>
-            </a:r>
-          </a:p>
-          <a:p>
-            <a:pPr>
-              <a:spcAft>
-                <a:spcPts val="600"/>
-              </a:spcAft>
-            </a:pPr>
-            <a:r>
-              <a:rPr sz="1500">
-                <a:solidFill>
-                  <a:srgbClr val="22282E"/>
-                </a:solidFill>
-              </a:rPr>
-              <a:t>•  Criterio de aceptación: identificas correctamente qué binario tiene NX+Canary+PIE+Full RELRO y</a:t>
-            </a:r>
-          </a:p>
-          <a:p>
-            <a:pPr>
-              <a:spcAft>
-                <a:spcPts val="600"/>
-              </a:spcAft>
-            </a:pPr>
-            <a:r>
-              <a:rPr sz="1500">
-                <a:solidFill>
-                  <a:srgbClr val="22282E"/>
-                </a:solidFill>
-              </a:rPr>
-              <a:t>•  justificas el orden de dificultad con base en las debilidades residuales.</a:t>
+              <a:t>•  Rellena una tabla mitigación → ataque que bloquea → debilidad residual.</a:t>
+            </a:r>
+          </a:p>
+          <a:p>
+            <a:pPr>
+              <a:spcAft>
+                <a:spcPts val="600"/>
+              </a:spcAft>
+            </a:pPr>
+            <a:r>
+              <a:rPr sz="1500">
+                <a:solidFill>
+                  <a:srgbClr val="22282E"/>
+                </a:solidFill>
+              </a:rPr>
+              <a:t>•  Explica por qué NX no impide ret2libc.</a:t>
+            </a:r>
+          </a:p>
+          <a:p>
+            <a:pPr>
+              <a:spcAft>
+                <a:spcPts val="600"/>
+              </a:spcAft>
+            </a:pPr>
+            <a:r>
+              <a:rPr sz="1500">
+                <a:solidFill>
+                  <a:srgbClr val="22282E"/>
+                </a:solidFill>
+              </a:rPr>
+              <a:t>•  Muestra en el desensamblado dónde se lee y compara el canary.</a:t>
+            </a:r>
+          </a:p>
+          <a:p>
+            <a:pPr>
+              <a:spcAft>
+                <a:spcPts val="600"/>
+              </a:spcAft>
+            </a:pPr>
+            <a:r>
+              <a:rPr sz="1500">
+                <a:solidFill>
+                  <a:srgbClr val="22282E"/>
+                </a:solidFill>
+              </a:rPr>
+              <a:t>•  Diferencia Partial RELRO de Full RELRO y su impacto en ataques a la GOT.</a:t>
+            </a:r>
+          </a:p>
+          <a:p>
+            <a:pPr>
+              <a:spcAft>
+                <a:spcPts val="600"/>
+              </a:spcAft>
+            </a:pPr>
+            <a:r>
+              <a:rPr sz="1500">
+                <a:solidFill>
+                  <a:srgbClr val="22282E"/>
+                </a:solidFill>
+              </a:rPr>
+              <a:t>•  Con ASLR activo, ejecuta 3 veces y registra la base de libc para ver la aleatorización.</a:t>
+            </a:r>
+          </a:p>
+          <a:p>
+            <a:pPr>
+              <a:spcAft>
+                <a:spcPts val="600"/>
+              </a:spcAft>
+            </a:pPr>
+            <a:r>
+              <a:rPr sz="1500">
+                <a:solidFill>
+                  <a:srgbClr val="22282E"/>
+                </a:solidFill>
+              </a:rPr>
+              <a:t>•  ¿Por qué PIE eleva el coste incluso con una fuga de libc?</a:t>
             </a:r>
           </a:p>
         </p:txBody>
